--- a/test-corpus/word-verification/medium-realistic.pptx
+++ b/test-corpus/word-verification/medium-realistic.pptx
@@ -144,7 +144,7 @@
         </p:nvSpPr>
         <p:spPr>
           <a:xfrm>
-            <a:off x="4518299" y="1028700"/>
+            <a:off x="2396891" y="1028700"/>
             <a:ext cx="469980" cy="235618"/>
           </a:xfrm>
           <a:prstGeom prst="roundRect">
@@ -212,7 +212,7 @@
         </p:nvSpPr>
         <p:spPr>
           <a:xfrm>
-            <a:off x="4461751" y="1515645"/>
+            <a:off x="2340343" y="1515645"/>
             <a:ext cx="583077" cy="235618"/>
           </a:xfrm>
           <a:prstGeom prst="rect">
@@ -280,7 +280,7 @@
         </p:nvSpPr>
         <p:spPr>
           <a:xfrm>
-            <a:off x="4336087" y="2002589"/>
+            <a:off x="2214679" y="2002589"/>
             <a:ext cx="834403" cy="659732"/>
           </a:xfrm>
           <a:prstGeom prst="diamond">
@@ -348,7 +348,7 @@
         </p:nvSpPr>
         <p:spPr>
           <a:xfrm>
-            <a:off x="4912881" y="5678237"/>
+            <a:off x="2791473" y="5678237"/>
             <a:ext cx="537838" cy="235618"/>
           </a:xfrm>
           <a:prstGeom prst="rect">
@@ -416,7 +416,7 @@
         </p:nvSpPr>
         <p:spPr>
           <a:xfrm>
-            <a:off x="4572334" y="6165182"/>
+            <a:off x="2450926" y="6165182"/>
             <a:ext cx="424741" cy="235618"/>
           </a:xfrm>
           <a:prstGeom prst="roundRect">
@@ -484,7 +484,7 @@
         </p:nvSpPr>
         <p:spPr>
           <a:xfrm>
-            <a:off x="3644940" y="2913647"/>
+            <a:off x="1523532" y="2913647"/>
             <a:ext cx="696174" cy="235618"/>
           </a:xfrm>
           <a:prstGeom prst="rect">
@@ -552,7 +552,7 @@
         </p:nvSpPr>
         <p:spPr>
           <a:xfrm>
-            <a:off x="3735418" y="3400592"/>
+            <a:off x="1614010" y="3400592"/>
             <a:ext cx="515219" cy="329866"/>
           </a:xfrm>
           <a:prstGeom prst="rect">
@@ -620,7 +620,7 @@
         </p:nvSpPr>
         <p:spPr>
           <a:xfrm>
-            <a:off x="3758037" y="3981784"/>
+            <a:off x="1636629" y="3981784"/>
             <a:ext cx="469980" cy="235618"/>
           </a:xfrm>
           <a:prstGeom prst="rect">
@@ -688,7 +688,7 @@
         </p:nvSpPr>
         <p:spPr>
           <a:xfrm>
-            <a:off x="3409950" y="4468729"/>
+            <a:off x="1288542" y="4468729"/>
             <a:ext cx="1166154" cy="471237"/>
           </a:xfrm>
           <a:prstGeom prst="diamond">
@@ -756,7 +756,7 @@
         </p:nvSpPr>
         <p:spPr>
           <a:xfrm>
-            <a:off x="3426286" y="5191292"/>
+            <a:off x="1304878" y="5191292"/>
             <a:ext cx="469980" cy="235618"/>
           </a:xfrm>
           <a:prstGeom prst="rect">
@@ -824,7 +824,7 @@
         </p:nvSpPr>
         <p:spPr>
           <a:xfrm>
-            <a:off x="4084761" y="5191292"/>
+            <a:off x="1963353" y="5191292"/>
             <a:ext cx="605696" cy="235618"/>
           </a:xfrm>
           <a:prstGeom prst="rect">
@@ -892,7 +892,7 @@
         </p:nvSpPr>
         <p:spPr>
           <a:xfrm>
-            <a:off x="4050832" y="5678237"/>
+            <a:off x="1929424" y="5678237"/>
             <a:ext cx="673555" cy="235618"/>
           </a:xfrm>
           <a:prstGeom prst="rect">
@@ -963,7 +963,7 @@
         </p:nvCxnSpPr>
         <p:spPr>
           <a:xfrm>
-            <a:off x="4753289" y="1264318"/>
+            <a:off x="2631881" y="1264318"/>
             <a:ext cx="0" cy="251327"/>
           </a:xfrm>
           <a:prstGeom prst="line">
@@ -1003,7 +1003,7 @@
         </p:nvCxnSpPr>
         <p:spPr>
           <a:xfrm>
-            <a:off x="4753289" y="1751263"/>
+            <a:off x="2631881" y="1751263"/>
             <a:ext cx="0" cy="251326"/>
           </a:xfrm>
           <a:prstGeom prst="line">
@@ -1043,7 +1043,7 @@
         </p:nvCxnSpPr>
         <p:spPr>
           <a:xfrm>
-            <a:off x="4753289" y="2662321"/>
+            <a:off x="2631881" y="2662321"/>
             <a:ext cx="428512" cy="3015916"/>
           </a:xfrm>
           <a:prstGeom prst="line">
@@ -1080,7 +1080,7 @@
         </p:nvSpPr>
         <p:spPr>
           <a:xfrm>
-            <a:off x="4888126" y="4132580"/>
+            <a:off x="2766718" y="4132580"/>
             <a:ext cx="158838" cy="75398"/>
           </a:xfrm>
           <a:prstGeom prst="rect">
@@ -1129,7 +1129,7 @@
         </p:nvCxnSpPr>
         <p:spPr>
           <a:xfrm flipH="1">
-            <a:off x="4784705" y="5913855"/>
+            <a:off x="2663297" y="5913855"/>
             <a:ext cx="397096" cy="251327"/>
           </a:xfrm>
           <a:prstGeom prst="line">
@@ -1169,7 +1169,7 @@
         </p:nvCxnSpPr>
         <p:spPr>
           <a:xfrm>
-            <a:off x="4336087" y="2332455"/>
+            <a:off x="2214679" y="2332455"/>
             <a:ext cx="5027" cy="699002"/>
           </a:xfrm>
           <a:prstGeom prst="line">
@@ -1206,7 +1206,7 @@
         </p:nvSpPr>
         <p:spPr>
           <a:xfrm>
-            <a:off x="4259182" y="2644257"/>
+            <a:off x="2137774" y="2644257"/>
             <a:ext cx="158838" cy="75398"/>
           </a:xfrm>
           <a:prstGeom prst="rect">
@@ -1255,7 +1255,7 @@
         </p:nvCxnSpPr>
         <p:spPr>
           <a:xfrm>
-            <a:off x="3993027" y="3149266"/>
+            <a:off x="1871619" y="3149266"/>
             <a:ext cx="0" cy="251326"/>
           </a:xfrm>
           <a:prstGeom prst="line">
@@ -1295,7 +1295,7 @@
         </p:nvCxnSpPr>
         <p:spPr>
           <a:xfrm>
-            <a:off x="3993027" y="3730458"/>
+            <a:off x="1871619" y="3730458"/>
             <a:ext cx="0" cy="251326"/>
           </a:xfrm>
           <a:prstGeom prst="line">
@@ -1335,7 +1335,7 @@
         </p:nvCxnSpPr>
         <p:spPr>
           <a:xfrm>
-            <a:off x="3993027" y="4217403"/>
+            <a:off x="1871619" y="4217403"/>
             <a:ext cx="0" cy="251326"/>
           </a:xfrm>
           <a:prstGeom prst="line">
@@ -1375,7 +1375,7 @@
         </p:nvCxnSpPr>
         <p:spPr>
           <a:xfrm flipH="1">
-            <a:off x="3661276" y="4939966"/>
+            <a:off x="1539868" y="4939966"/>
             <a:ext cx="331751" cy="251326"/>
           </a:xfrm>
           <a:prstGeom prst="line">
@@ -1412,7 +1412,7 @@
         </p:nvSpPr>
         <p:spPr>
           <a:xfrm>
-            <a:off x="3747733" y="5027930"/>
+            <a:off x="1626325" y="5027930"/>
             <a:ext cx="158838" cy="75398"/>
           </a:xfrm>
           <a:prstGeom prst="rect">
@@ -1461,7 +1461,7 @@
         </p:nvCxnSpPr>
         <p:spPr>
           <a:xfrm flipV="1">
-            <a:off x="3661276" y="4939966"/>
+            <a:off x="1539868" y="4939966"/>
             <a:ext cx="331751" cy="251326"/>
           </a:xfrm>
           <a:prstGeom prst="line">
@@ -1501,7 +1501,7 @@
         </p:nvCxnSpPr>
         <p:spPr>
           <a:xfrm>
-            <a:off x="3993027" y="4939966"/>
+            <a:off x="1871619" y="4939966"/>
             <a:ext cx="394582" cy="251326"/>
           </a:xfrm>
           <a:prstGeom prst="line">
@@ -1538,7 +1538,7 @@
         </p:nvSpPr>
         <p:spPr>
           <a:xfrm>
-            <a:off x="4110899" y="5027930"/>
+            <a:off x="1989491" y="5027930"/>
             <a:ext cx="158838" cy="75398"/>
           </a:xfrm>
           <a:prstGeom prst="rect">
@@ -1587,7 +1587,7 @@
         </p:nvCxnSpPr>
         <p:spPr>
           <a:xfrm>
-            <a:off x="4387609" y="5426911"/>
+            <a:off x="2266201" y="5426911"/>
             <a:ext cx="0" cy="251326"/>
           </a:xfrm>
           <a:prstGeom prst="line">
@@ -1627,7 +1627,7 @@
         </p:nvCxnSpPr>
         <p:spPr>
           <a:xfrm>
-            <a:off x="4387609" y="5913855"/>
+            <a:off x="2266201" y="5913855"/>
             <a:ext cx="397096" cy="251327"/>
           </a:xfrm>
           <a:prstGeom prst="line">
@@ -1656,6 +1656,270 @@
           </a:fontRef>
         </p:style>
       </p:cxnSp>
+      <p:sp>
+        <p:nvSpPr>
+          <p:cNvPr id="4" name="Mermaid source"/>
+          <p:cNvSpPr/>
+          <p:nvPr/>
+        </p:nvSpPr>
+        <p:spPr>
+          <a:xfrm>
+            <a:off x="7674864" y="1028700"/>
+            <a:ext cx="4059936" cy="5372100"/>
+          </a:xfrm>
+          <a:prstGeom prst="rect">
+            <a:avLst/>
+          </a:prstGeom>
+          <a:solidFill>
+            <a:srgbClr val="F3F4F6"/>
+          </a:solidFill>
+          <a:ln w="9525">
+            <a:solidFill>
+              <a:srgbClr val="D1D5DB"/>
+            </a:solidFill>
+          </a:ln>
+        </p:spPr>
+        <p:txBody>
+          <a:bodyPr wrap="square" lIns="91440" tIns="45720" rIns="91440" bIns="45720" anchor="t">
+            <a:noAutofit/>
+          </a:bodyPr>
+          <a:lstStyle/>
+          <a:p>
+            <a:pPr algn="l"/>
+            <a:r>
+              <a:rPr lang="en-US" sz="1250" dirty="0">
+                <a:solidFill>
+                  <a:srgbClr val="1F2937"/>
+                </a:solidFill>
+                <a:latin typeface="Consolas"/>
+                <a:cs typeface="Consolas"/>
+              </a:rPr>
+              <a:t>flowchart TD</a:t>
+            </a:r>
+          </a:p>
+          <a:p>
+            <a:pPr algn="l"/>
+            <a:r>
+              <a:rPr lang="en-US" sz="1250" dirty="0">
+                <a:solidFill>
+                  <a:srgbClr val="1F2937"/>
+                </a:solidFill>
+                <a:latin typeface="Consolas"/>
+                <a:cs typeface="Consolas"/>
+              </a:rPr>
+              <a:t>    classDef process fill:#BDD7EE</a:t>
+            </a:r>
+          </a:p>
+          <a:p>
+            <a:pPr algn="l"/>
+            <a:r>
+              <a:rPr lang="en-US" sz="1250" dirty="0">
+                <a:solidFill>
+                  <a:srgbClr val="1F2937"/>
+                </a:solidFill>
+                <a:latin typeface="Consolas"/>
+                <a:cs typeface="Consolas"/>
+              </a:rPr>
+              <a:t>    classDef gate fill:#FFE699</a:t>
+            </a:r>
+          </a:p>
+          <a:p>
+            <a:pPr algn="l"/>
+            <a:r>
+              <a:rPr lang="en-US" sz="1250" dirty="0">
+                <a:solidFill>
+                  <a:srgbClr val="1F2937"/>
+                </a:solidFill>
+                <a:latin typeface="Consolas"/>
+                <a:cs typeface="Consolas"/>
+              </a:rPr>
+              <a:t>    classDef terminal fill:#C6E0B4</a:t>
+            </a:r>
+          </a:p>
+          <a:p>
+            <a:pPr algn="l"/>
+            <a:r>
+              <a:rPr lang="en-US" sz="1250" dirty="0">
+                <a:solidFill>
+                  <a:srgbClr val="1F2937"/>
+                </a:solidFill>
+                <a:latin typeface="Consolas"/>
+                <a:cs typeface="Consolas"/>
+              </a:rPr>
+              <a:t>    Start([Demarrer]):::terminal --&gt; Lire[Lire config]:::process</a:t>
+            </a:r>
+          </a:p>
+          <a:p>
+            <a:pPr algn="l"/>
+            <a:r>
+              <a:rPr lang="en-US" sz="1250" dirty="0">
+                <a:solidFill>
+                  <a:srgbClr val="1F2937"/>
+                </a:solidFill>
+                <a:latin typeface="Consolas"/>
+                <a:cs typeface="Consolas"/>
+              </a:rPr>
+              <a:t>    Lire --&gt; Valider{Config</a:t>
+            </a:r>
+          </a:p>
+          <a:p>
+            <a:pPr algn="l"/>
+            <a:r>
+              <a:rPr lang="en-US" sz="1250" dirty="0">
+                <a:solidFill>
+                  <a:srgbClr val="1F2937"/>
+                </a:solidFill>
+                <a:latin typeface="Consolas"/>
+                <a:cs typeface="Consolas"/>
+              </a:rPr>
+              <a:t> valide?}:::gate</a:t>
+            </a:r>
+          </a:p>
+          <a:p>
+            <a:pPr algn="l"/>
+            <a:r>
+              <a:rPr lang="en-US" sz="1250" dirty="0">
+                <a:solidFill>
+                  <a:srgbClr val="1F2937"/>
+                </a:solidFill>
+                <a:latin typeface="Consolas"/>
+                <a:cs typeface="Consolas"/>
+              </a:rPr>
+              <a:t>    Valider --&gt;|non| Erreur[Log erreur]:::terminal</a:t>
+            </a:r>
+          </a:p>
+          <a:p>
+            <a:pPr algn="l"/>
+            <a:r>
+              <a:rPr lang="en-US" sz="1250" dirty="0">
+                <a:solidFill>
+                  <a:srgbClr val="1F2937"/>
+                </a:solidFill>
+                <a:latin typeface="Consolas"/>
+                <a:cs typeface="Consolas"/>
+              </a:rPr>
+              <a:t>    Erreur --&gt; Stop([Arreter]):::terminal</a:t>
+            </a:r>
+          </a:p>
+          <a:p>
+            <a:pPr algn="l"/>
+            <a:r>
+              <a:rPr lang="en-US" sz="1250" dirty="0">
+                <a:solidFill>
+                  <a:srgbClr val="1F2937"/>
+                </a:solidFill>
+                <a:latin typeface="Consolas"/>
+                <a:cs typeface="Consolas"/>
+              </a:rPr>
+              <a:t>    Valider --&gt;|oui| Connect[Connecter API]:::process</a:t>
+            </a:r>
+          </a:p>
+          <a:p>
+            <a:pPr algn="l"/>
+            <a:r>
+              <a:rPr lang="en-US" sz="1250" dirty="0">
+                <a:solidFill>
+                  <a:srgbClr val="1F2937"/>
+                </a:solidFill>
+                <a:latin typeface="Consolas"/>
+                <a:cs typeface="Consolas"/>
+              </a:rPr>
+              <a:t>    Connect --&gt; Fetch[Recuperer donnees]:::process</a:t>
+            </a:r>
+          </a:p>
+          <a:p>
+            <a:pPr algn="l"/>
+            <a:r>
+              <a:rPr lang="en-US" sz="1250" dirty="0">
+                <a:solidFill>
+                  <a:srgbClr val="1F2937"/>
+                </a:solidFill>
+                <a:latin typeface="Consolas"/>
+                <a:cs typeface="Consolas"/>
+              </a:rPr>
+              <a:t>    Fetch --&gt; Clean[Nettoyer]:::process</a:t>
+            </a:r>
+          </a:p>
+          <a:p>
+            <a:pPr algn="l"/>
+            <a:r>
+              <a:rPr lang="en-US" sz="1250" dirty="0">
+                <a:solidFill>
+                  <a:srgbClr val="1F2937"/>
+                </a:solidFill>
+                <a:latin typeface="Consolas"/>
+                <a:cs typeface="Consolas"/>
+              </a:rPr>
+              <a:t>    Clean --&gt; Check{Donnees ok?}:::gate</a:t>
+            </a:r>
+          </a:p>
+          <a:p>
+            <a:pPr algn="l"/>
+            <a:r>
+              <a:rPr lang="en-US" sz="1250" dirty="0">
+                <a:solidFill>
+                  <a:srgbClr val="1F2937"/>
+                </a:solidFill>
+                <a:latin typeface="Consolas"/>
+                <a:cs typeface="Consolas"/>
+              </a:rPr>
+              <a:t>    Check --&gt;|non| Retry[Retenter]:::process</a:t>
+            </a:r>
+          </a:p>
+          <a:p>
+            <a:pPr algn="l"/>
+            <a:r>
+              <a:rPr lang="en-US" sz="1250" dirty="0">
+                <a:solidFill>
+                  <a:srgbClr val="1F2937"/>
+                </a:solidFill>
+                <a:latin typeface="Consolas"/>
+                <a:cs typeface="Consolas"/>
+              </a:rPr>
+              <a:t>    Retry --&gt; Check</a:t>
+            </a:r>
+          </a:p>
+          <a:p>
+            <a:pPr algn="l"/>
+            <a:r>
+              <a:rPr lang="en-US" sz="1250" dirty="0">
+                <a:solidFill>
+                  <a:srgbClr val="1F2937"/>
+                </a:solidFill>
+                <a:latin typeface="Consolas"/>
+                <a:cs typeface="Consolas"/>
+              </a:rPr>
+              <a:t>    Check --&gt;|oui| Save[Sauvegarder]:::process</a:t>
+            </a:r>
+          </a:p>
+          <a:p>
+            <a:pPr algn="l"/>
+            <a:r>
+              <a:rPr lang="en-US" sz="1250" dirty="0">
+                <a:solidFill>
+                  <a:srgbClr val="1F2937"/>
+                </a:solidFill>
+                <a:latin typeface="Consolas"/>
+                <a:cs typeface="Consolas"/>
+              </a:rPr>
+              <a:t>    Save --&gt; Notify[Notifier user]:::process</a:t>
+            </a:r>
+          </a:p>
+          <a:p>
+            <a:pPr algn="l"/>
+            <a:r>
+              <a:rPr lang="en-US" sz="1250" dirty="0">
+                <a:solidFill>
+                  <a:srgbClr val="1F2937"/>
+                </a:solidFill>
+                <a:latin typeface="Consolas"/>
+                <a:cs typeface="Consolas"/>
+              </a:rPr>
+              <a:t>    Notify --&gt; Stop</a:t>
+            </a:r>
+          </a:p>
+        </p:txBody>
+      </p:sp>
     </p:spTree>
   </p:cSld>
   <p:clrMapOvr>
